--- a/classes/parte-4-seguridad-de-aplicaciones-web/107-server-side-template-injection-ssti/clase-107-presentacion.pptx
+++ b/classes/parte-4-seguridad-de-aplicaciones-web/107-server-side-template-injection-ssti/clase-107-presentacion.pptx
@@ -17,6 +17,9 @@
     <p:sldId id="265" r:id="rId16"/>
     <p:sldId id="266" r:id="rId17"/>
     <p:sldId id="267" r:id="rId18"/>
+    <p:sldId id="268" r:id="rId19"/>
+    <p:sldId id="269" r:id="rId20"/>
+    <p:sldId id="270" r:id="rId21"/>
   </p:sldIdLst>
   <p:sldSz cx="9144000" cy="6858000" type="screen4x3"/>
   <p:notesSz cx="6858000" cy="9144000"/>
@@ -3198,7 +3201,7 @@
                   <a:srgbClr val="0B3D2E"/>
                 </a:solidFill>
               </a:rPr>
-              <a:t>⚠️ Errores comunes</a:t>
+              <a:t>✍️ Ejercicios</a:t>
             </a:r>
           </a:p>
         </p:txBody>
@@ -3236,67 +3239,82 @@
                   <a:srgbClr val="22282E"/>
                 </a:solidFill>
               </a:rPr>
-              <a:t>•  {{77}} sale literal — No hay SSTI ahí; puede ser XSS o texto plano</a:t>
-            </a:r>
-          </a:p>
-          <a:p>
-            <a:pPr>
-              <a:spcAft>
-                <a:spcPts val="600"/>
-              </a:spcAft>
-            </a:pPr>
-            <a:r>
-              <a:rPr sz="1500">
-                <a:solidFill>
-                  <a:srgbClr val="22282E"/>
-                </a:solidFill>
-              </a:rPr>
-              <a:t>•  49 pero sin RCE — Motor con sandbox; busca bypass conocido</a:t>
-            </a:r>
-          </a:p>
-          <a:p>
-            <a:pPr>
-              <a:spcAft>
-                <a:spcPts val="600"/>
-              </a:spcAft>
-            </a:pPr>
-            <a:r>
-              <a:rPr sz="1500">
-                <a:solidFill>
-                  <a:srgbClr val="22282E"/>
-                </a:solidFill>
-              </a:rPr>
-              <a:t>•  Payload de otro motor falla — Fingerprint incorrecto; ajusta el motor</a:t>
-            </a:r>
-          </a:p>
-          <a:p>
-            <a:pPr>
-              <a:spcAft>
-                <a:spcPts val="600"/>
-              </a:spcAft>
-            </a:pPr>
-            <a:r>
-              <a:rPr sz="1500">
-                <a:solidFill>
-                  <a:srgbClr val="22282E"/>
-                </a:solidFill>
-              </a:rPr>
-              <a:t>•  tplmap no detecta — Contexto peculiar; prueba manual</a:t>
-            </a:r>
-          </a:p>
-          <a:p>
-            <a:pPr>
-              <a:spcAft>
-                <a:spcPts val="600"/>
-              </a:spcAft>
-            </a:pPr>
-            <a:r>
-              <a:rPr sz="1500">
-                <a:solidFill>
-                  <a:srgbClr val="22282E"/>
-                </a:solidFill>
-              </a:rPr>
-              <a:t>•  RCE ciega — Usa OOB para confirmar</a:t>
+              <a:t>•  Diferencia la respuesta de {{77}} en SSTI de un simple reflejo de texto.</a:t>
+            </a:r>
+          </a:p>
+          <a:p>
+            <a:pPr>
+              <a:spcAft>
+                <a:spcPts val="600"/>
+              </a:spcAft>
+            </a:pPr>
+            <a:r>
+              <a:rPr sz="1500">
+                <a:solidFill>
+                  <a:srgbClr val="22282E"/>
+                </a:solidFill>
+              </a:rPr>
+              <a:t>•  Haz fingerprinting distinguiendo Jinja2 de Twig con payloads.</a:t>
+            </a:r>
+          </a:p>
+          <a:p>
+            <a:pPr>
+              <a:spcAft>
+                <a:spcPts val="600"/>
+              </a:spcAft>
+            </a:pPr>
+            <a:r>
+              <a:rPr sz="1500">
+                <a:solidFill>
+                  <a:srgbClr val="22282E"/>
+                </a:solidFill>
+              </a:rPr>
+              <a:t>•  Explica la cadena class → mro → subclasses en Python.</a:t>
+            </a:r>
+          </a:p>
+          <a:p>
+            <a:pPr>
+              <a:spcAft>
+                <a:spcPts val="600"/>
+              </a:spcAft>
+            </a:pPr>
+            <a:r>
+              <a:rPr sz="1500">
+                <a:solidFill>
+                  <a:srgbClr val="22282E"/>
+                </a:solidFill>
+              </a:rPr>
+              <a:t>•  Diferencia SSTI de XSS: mismo {{77}}, distinto sink.</a:t>
+            </a:r>
+          </a:p>
+          <a:p>
+            <a:pPr>
+              <a:spcAft>
+                <a:spcPts val="600"/>
+              </a:spcAft>
+            </a:pPr>
+            <a:r>
+              <a:rPr sz="1500">
+                <a:solidFill>
+                  <a:srgbClr val="22282E"/>
+                </a:solidFill>
+              </a:rPr>
+              <a:t>•  Usa tplmap y luego reproduce manualmente su payload.</a:t>
+            </a:r>
+          </a:p>
+          <a:p>
+            <a:pPr>
+              <a:spcAft>
+                <a:spcPts val="600"/>
+              </a:spcAft>
+            </a:pPr>
+            <a:r>
+              <a:rPr sz="1500">
+                <a:solidFill>
+                  <a:srgbClr val="22282E"/>
+                </a:solidFill>
+              </a:rPr>
+              <a:t>•  Propón una arquitectura con plantillas logic-less para el caso de uso.</a:t>
             </a:r>
           </a:p>
         </p:txBody>
@@ -3347,7 +3365,7 @@
                   <a:srgbClr val="0B3D2E"/>
                 </a:solidFill>
               </a:rPr>
-              <a:t>❓ Preguntas frecuentes</a:t>
+              <a:t>📝 Reto verificable</a:t>
             </a:r>
           </a:p>
         </p:txBody>
@@ -3385,82 +3403,22 @@
                   <a:srgbClr val="22282E"/>
                 </a:solidFill>
               </a:rPr>
-              <a:t>•  ❓ ¿SSTI siempre es RCE?</a:t>
-            </a:r>
-          </a:p>
-          <a:p>
-            <a:pPr>
-              <a:spcAft>
-                <a:spcPts val="600"/>
-              </a:spcAft>
-            </a:pPr>
-            <a:r>
-              <a:rPr sz="1500">
-                <a:solidFill>
-                  <a:srgbClr val="22282E"/>
-                </a:solidFill>
-              </a:rPr>
-              <a:t>•  No siempre; depende del motor y su sandbox. A veces solo permite leer datos, pero muchos motores llegan a RCE.</a:t>
-            </a:r>
-          </a:p>
-          <a:p>
-            <a:pPr>
-              <a:spcAft>
-                <a:spcPts val="600"/>
-              </a:spcAft>
-            </a:pPr>
-            <a:r>
-              <a:rPr sz="1500">
-                <a:solidFill>
-                  <a:srgbClr val="22282E"/>
-                </a:solidFill>
-              </a:rPr>
-              <a:t>•  ❓ ¿Cómo distingo SSTI de XSS?</a:t>
-            </a:r>
-          </a:p>
-          <a:p>
-            <a:pPr>
-              <a:spcAft>
-                <a:spcPts val="600"/>
-              </a:spcAft>
-            </a:pPr>
-            <a:r>
-              <a:rPr sz="1500">
-                <a:solidFill>
-                  <a:srgbClr val="22282E"/>
-                </a:solidFill>
-              </a:rPr>
-              <a:t>•  {{77}} que devuelve 49 indica evaluación en servidor (SSTI); si aparece literal y ejecuta JS, es XSS en cliente.</a:t>
-            </a:r>
-          </a:p>
-          <a:p>
-            <a:pPr>
-              <a:spcAft>
-                <a:spcPts val="600"/>
-              </a:spcAft>
-            </a:pPr>
-            <a:r>
-              <a:rPr sz="1500">
-                <a:solidFill>
-                  <a:srgbClr val="22282E"/>
-                </a:solidFill>
-              </a:rPr>
-              <a:t>•  ❓ ¿El sandbox me protege?</a:t>
-            </a:r>
-          </a:p>
-          <a:p>
-            <a:pPr>
-              <a:spcAft>
-                <a:spcPts val="600"/>
-              </a:spcAft>
-            </a:pPr>
-            <a:r>
-              <a:rPr sz="1500">
-                <a:solidFill>
-                  <a:srgbClr val="22282E"/>
-                </a:solidFill>
-              </a:rPr>
-              <a:t>•  Ayuda, pero muchos sandboxes de plantillas han sido evadidos. La defensa robusta es no meter input del usuario en la plantilla.</a:t>
+              <a:t>•  Resuelve un lab de SSTI de PortSwigger que exija fingerprint + RCE y ejecuta un comando (p. ej. leer un archivo del sistema).</a:t>
+            </a:r>
+          </a:p>
+          <a:p>
+            <a:pPr>
+              <a:spcAft>
+                <a:spcPts val="600"/>
+              </a:spcAft>
+            </a:pPr>
+            <a:r>
+              <a:rPr sz="1500">
+                <a:solidFill>
+                  <a:srgbClr val="22282E"/>
+                </a:solidFill>
+              </a:rPr>
+              <a:t>•  Criterio de aceptación: el lab queda resuelto, documentas el motor identificado, la cadena de payloads y la defensa (sandbox, separar datos de plantilla, motor logic-less).</a:t>
             </a:r>
           </a:p>
         </p:txBody>
@@ -3511,7 +3469,7 @@
                   <a:srgbClr val="0B3D2E"/>
                 </a:solidFill>
               </a:rPr>
-              <a:t>🔗 Referencias</a:t>
+              <a:t>⚠️ Errores comunes</a:t>
             </a:r>
           </a:p>
         </p:txBody>
@@ -3549,6 +3507,319 @@
                   <a:srgbClr val="22282E"/>
                 </a:solidFill>
               </a:rPr>
+              <a:t>•  {{77}} sale literal — No hay SSTI ahí; puede ser XSS o texto plano</a:t>
+            </a:r>
+          </a:p>
+          <a:p>
+            <a:pPr>
+              <a:spcAft>
+                <a:spcPts val="600"/>
+              </a:spcAft>
+            </a:pPr>
+            <a:r>
+              <a:rPr sz="1500">
+                <a:solidFill>
+                  <a:srgbClr val="22282E"/>
+                </a:solidFill>
+              </a:rPr>
+              <a:t>•  49 pero sin RCE — Motor con sandbox; busca bypass conocido</a:t>
+            </a:r>
+          </a:p>
+          <a:p>
+            <a:pPr>
+              <a:spcAft>
+                <a:spcPts val="600"/>
+              </a:spcAft>
+            </a:pPr>
+            <a:r>
+              <a:rPr sz="1500">
+                <a:solidFill>
+                  <a:srgbClr val="22282E"/>
+                </a:solidFill>
+              </a:rPr>
+              <a:t>•  Payload de otro motor falla — Fingerprint incorrecto; ajusta el motor</a:t>
+            </a:r>
+          </a:p>
+          <a:p>
+            <a:pPr>
+              <a:spcAft>
+                <a:spcPts val="600"/>
+              </a:spcAft>
+            </a:pPr>
+            <a:r>
+              <a:rPr sz="1500">
+                <a:solidFill>
+                  <a:srgbClr val="22282E"/>
+                </a:solidFill>
+              </a:rPr>
+              <a:t>•  tplmap no detecta — Contexto peculiar; prueba manual</a:t>
+            </a:r>
+          </a:p>
+          <a:p>
+            <a:pPr>
+              <a:spcAft>
+                <a:spcPts val="600"/>
+              </a:spcAft>
+            </a:pPr>
+            <a:r>
+              <a:rPr sz="1500">
+                <a:solidFill>
+                  <a:srgbClr val="22282E"/>
+                </a:solidFill>
+              </a:rPr>
+              <a:t>•  RCE ciega — Usa OOB para confirmar</a:t>
+            </a:r>
+          </a:p>
+        </p:txBody>
+      </p:sp>
+    </p:spTree>
+  </p:cSld>
+  <p:clrMapOvr>
+    <a:masterClrMapping/>
+  </p:clrMapOvr>
+</p:sld>
+</file>
+
+<file path=ppt/slides/slide13.xml><?xml version="1.0" encoding="utf-8"?>
+<p:sld xmlns:a="http://schemas.openxmlformats.org/drawingml/2006/main" xmlns:p="http://schemas.openxmlformats.org/presentationml/2006/main" xmlns:r="http://schemas.openxmlformats.org/officeDocument/2006/relationships">
+  <p:cSld>
+    <p:spTree>
+      <p:nvGrpSpPr>
+        <p:cNvPr id="1" name=""/>
+        <p:cNvGrpSpPr/>
+        <p:nvPr/>
+      </p:nvGrpSpPr>
+      <p:grpSpPr/>
+      <p:sp>
+        <p:nvSpPr>
+          <p:cNvPr id="2" name="TextBox 1"/>
+          <p:cNvSpPr txBox="1"/>
+          <p:nvPr/>
+        </p:nvSpPr>
+        <p:spPr>
+          <a:xfrm>
+            <a:off x="457200" y="320040"/>
+            <a:ext cx="8229600" cy="822960"/>
+          </a:xfrm>
+          <a:prstGeom prst="rect">
+            <a:avLst/>
+          </a:prstGeom>
+          <a:noFill/>
+        </p:spPr>
+        <p:txBody>
+          <a:bodyPr wrap="square">
+            <a:spAutoFit/>
+          </a:bodyPr>
+          <a:lstStyle/>
+          <a:p>
+            <a:r>
+              <a:rPr sz="2600" b="1">
+                <a:solidFill>
+                  <a:srgbClr val="0B3D2E"/>
+                </a:solidFill>
+              </a:rPr>
+              <a:t>❓ Preguntas frecuentes</a:t>
+            </a:r>
+          </a:p>
+        </p:txBody>
+      </p:sp>
+      <p:sp>
+        <p:nvSpPr>
+          <p:cNvPr id="3" name="TextBox 2"/>
+          <p:cNvSpPr txBox="1"/>
+          <p:nvPr/>
+        </p:nvSpPr>
+        <p:spPr>
+          <a:xfrm>
+            <a:off x="457200" y="1280160"/>
+            <a:ext cx="8229600" cy="4937760"/>
+          </a:xfrm>
+          <a:prstGeom prst="rect">
+            <a:avLst/>
+          </a:prstGeom>
+          <a:noFill/>
+        </p:spPr>
+        <p:txBody>
+          <a:bodyPr wrap="square">
+            <a:spAutoFit/>
+          </a:bodyPr>
+          <a:lstStyle/>
+          <a:p>
+            <a:pPr>
+              <a:spcAft>
+                <a:spcPts val="600"/>
+              </a:spcAft>
+            </a:pPr>
+            <a:r>
+              <a:rPr sz="1500">
+                <a:solidFill>
+                  <a:srgbClr val="22282E"/>
+                </a:solidFill>
+              </a:rPr>
+              <a:t>•  ❓ ¿SSTI siempre es RCE?</a:t>
+            </a:r>
+          </a:p>
+          <a:p>
+            <a:pPr>
+              <a:spcAft>
+                <a:spcPts val="600"/>
+              </a:spcAft>
+            </a:pPr>
+            <a:r>
+              <a:rPr sz="1500">
+                <a:solidFill>
+                  <a:srgbClr val="22282E"/>
+                </a:solidFill>
+              </a:rPr>
+              <a:t>•  No siempre; depende del motor y su sandbox. A veces solo permite leer datos, pero muchos motores llegan a RCE.</a:t>
+            </a:r>
+          </a:p>
+          <a:p>
+            <a:pPr>
+              <a:spcAft>
+                <a:spcPts val="600"/>
+              </a:spcAft>
+            </a:pPr>
+            <a:r>
+              <a:rPr sz="1500">
+                <a:solidFill>
+                  <a:srgbClr val="22282E"/>
+                </a:solidFill>
+              </a:rPr>
+              <a:t>•  ❓ ¿Cómo distingo SSTI de XSS?</a:t>
+            </a:r>
+          </a:p>
+          <a:p>
+            <a:pPr>
+              <a:spcAft>
+                <a:spcPts val="600"/>
+              </a:spcAft>
+            </a:pPr>
+            <a:r>
+              <a:rPr sz="1500">
+                <a:solidFill>
+                  <a:srgbClr val="22282E"/>
+                </a:solidFill>
+              </a:rPr>
+              <a:t>•  {{77}} que devuelve 49 indica evaluación en servidor (SSTI); si aparece literal y ejecuta JS, es XSS en cliente.</a:t>
+            </a:r>
+          </a:p>
+          <a:p>
+            <a:pPr>
+              <a:spcAft>
+                <a:spcPts val="600"/>
+              </a:spcAft>
+            </a:pPr>
+            <a:r>
+              <a:rPr sz="1500">
+                <a:solidFill>
+                  <a:srgbClr val="22282E"/>
+                </a:solidFill>
+              </a:rPr>
+              <a:t>•  ❓ ¿El sandbox me protege?</a:t>
+            </a:r>
+          </a:p>
+          <a:p>
+            <a:pPr>
+              <a:spcAft>
+                <a:spcPts val="600"/>
+              </a:spcAft>
+            </a:pPr>
+            <a:r>
+              <a:rPr sz="1500">
+                <a:solidFill>
+                  <a:srgbClr val="22282E"/>
+                </a:solidFill>
+              </a:rPr>
+              <a:t>•  Ayuda, pero muchos sandboxes de plantillas han sido evadidos. La defensa robusta es no meter input del usuario en la plantilla.</a:t>
+            </a:r>
+          </a:p>
+        </p:txBody>
+      </p:sp>
+    </p:spTree>
+  </p:cSld>
+  <p:clrMapOvr>
+    <a:masterClrMapping/>
+  </p:clrMapOvr>
+</p:sld>
+</file>
+
+<file path=ppt/slides/slide14.xml><?xml version="1.0" encoding="utf-8"?>
+<p:sld xmlns:a="http://schemas.openxmlformats.org/drawingml/2006/main" xmlns:p="http://schemas.openxmlformats.org/presentationml/2006/main" xmlns:r="http://schemas.openxmlformats.org/officeDocument/2006/relationships">
+  <p:cSld>
+    <p:spTree>
+      <p:nvGrpSpPr>
+        <p:cNvPr id="1" name=""/>
+        <p:cNvGrpSpPr/>
+        <p:nvPr/>
+      </p:nvGrpSpPr>
+      <p:grpSpPr/>
+      <p:sp>
+        <p:nvSpPr>
+          <p:cNvPr id="2" name="TextBox 1"/>
+          <p:cNvSpPr txBox="1"/>
+          <p:nvPr/>
+        </p:nvSpPr>
+        <p:spPr>
+          <a:xfrm>
+            <a:off x="457200" y="320040"/>
+            <a:ext cx="8229600" cy="822960"/>
+          </a:xfrm>
+          <a:prstGeom prst="rect">
+            <a:avLst/>
+          </a:prstGeom>
+          <a:noFill/>
+        </p:spPr>
+        <p:txBody>
+          <a:bodyPr wrap="square">
+            <a:spAutoFit/>
+          </a:bodyPr>
+          <a:lstStyle/>
+          <a:p>
+            <a:r>
+              <a:rPr sz="2600" b="1">
+                <a:solidFill>
+                  <a:srgbClr val="0B3D2E"/>
+                </a:solidFill>
+              </a:rPr>
+              <a:t>🔗 Referencias</a:t>
+            </a:r>
+          </a:p>
+        </p:txBody>
+      </p:sp>
+      <p:sp>
+        <p:nvSpPr>
+          <p:cNvPr id="3" name="TextBox 2"/>
+          <p:cNvSpPr txBox="1"/>
+          <p:nvPr/>
+        </p:nvSpPr>
+        <p:spPr>
+          <a:xfrm>
+            <a:off x="457200" y="1280160"/>
+            <a:ext cx="8229600" cy="4937760"/>
+          </a:xfrm>
+          <a:prstGeom prst="rect">
+            <a:avLst/>
+          </a:prstGeom>
+          <a:noFill/>
+        </p:spPr>
+        <p:txBody>
+          <a:bodyPr wrap="square">
+            <a:spAutoFit/>
+          </a:bodyPr>
+          <a:lstStyle/>
+          <a:p>
+            <a:pPr>
+              <a:spcAft>
+                <a:spcPts val="600"/>
+              </a:spcAft>
+            </a:pPr>
+            <a:r>
+              <a:rPr sz="1500">
+                <a:solidFill>
+                  <a:srgbClr val="22282E"/>
+                </a:solidFill>
+              </a:rPr>
               <a:t>•  Yaworski, Real-World Bug Hunting, cap. de template injection.</a:t>
             </a:r>
           </a:p>
@@ -3584,6 +3855,81 @@
           </a:p>
         </p:txBody>
       </p:sp>
+    </p:spTree>
+  </p:cSld>
+  <p:clrMapOvr>
+    <a:masterClrMapping/>
+  </p:clrMapOvr>
+</p:sld>
+</file>
+
+<file path=ppt/slides/slide15.xml><?xml version="1.0" encoding="utf-8"?>
+<p:sld xmlns:a="http://schemas.openxmlformats.org/drawingml/2006/main" xmlns:p="http://schemas.openxmlformats.org/presentationml/2006/main" xmlns:r="http://schemas.openxmlformats.org/officeDocument/2006/relationships">
+  <p:cSld>
+    <p:spTree>
+      <p:nvGrpSpPr>
+        <p:cNvPr id="1" name=""/>
+        <p:cNvGrpSpPr/>
+        <p:nvPr/>
+      </p:nvGrpSpPr>
+      <p:grpSpPr/>
+      <p:sp>
+        <p:nvSpPr>
+          <p:cNvPr id="2" name="TextBox 1"/>
+          <p:cNvSpPr txBox="1"/>
+          <p:nvPr/>
+        </p:nvSpPr>
+        <p:spPr>
+          <a:xfrm>
+            <a:off x="457200" y="274320"/>
+            <a:ext cx="8229600" cy="640080"/>
+          </a:xfrm>
+          <a:prstGeom prst="rect">
+            <a:avLst/>
+          </a:prstGeom>
+          <a:noFill/>
+        </p:spPr>
+        <p:txBody>
+          <a:bodyPr wrap="square">
+            <a:spAutoFit/>
+          </a:bodyPr>
+          <a:lstStyle/>
+          <a:p>
+            <a:r>
+              <a:rPr sz="2200" b="1">
+                <a:solidFill>
+                  <a:srgbClr val="0B3D2E"/>
+                </a:solidFill>
+              </a:rPr>
+              <a:t>Diagrama de la clase</a:t>
+            </a:r>
+          </a:p>
+        </p:txBody>
+      </p:sp>
+      <p:pic>
+        <p:nvPicPr>
+          <p:cNvPr id="3" name="Picture 2" descr="b319a9ad01c66c2d.png"/>
+          <p:cNvPicPr>
+            <a:picLocks noChangeAspect="1"/>
+          </p:cNvPicPr>
+          <p:nvPr/>
+        </p:nvPicPr>
+        <p:blipFill>
+          <a:blip r:embed="rId2"/>
+          <a:stretch>
+            <a:fillRect/>
+          </a:stretch>
+        </p:blipFill>
+        <p:spPr>
+          <a:xfrm>
+            <a:off x="3089669" y="1097280"/>
+            <a:ext cx="2964661" cy="5303520"/>
+          </a:xfrm>
+          <a:prstGeom prst="rect">
+            <a:avLst/>
+          </a:prstGeom>
+        </p:spPr>
+      </p:pic>
     </p:spTree>
   </p:cSld>
   <p:clrMapOvr>
@@ -3668,7 +4014,7 @@
                   <a:srgbClr val="22282E"/>
                 </a:solidFill>
               </a:rPr>
-              <a:t>•  Explotar la inyección de plantillas del lado servidor (SSTI): cuando el input del usuario se evalúa como parte de una plantilla (Jinja2, Twig, Freemarker, etc.), permitiendo desde filtración de datos hasta RCE. Es un fallo potente que aparece en emails personalizados, generación de documentos y paneles configurables.</a:t>
+              <a:t>•  Explotar la inyección de plantillas del lado servidor (SSTI): cuando el input del usuario se evalúa como parte de una plantilla (Jinja2, Twig, Freemarker, etc.), permitiendo desde filtración de datos…</a:t>
             </a:r>
           </a:p>
         </p:txBody>
@@ -4062,7 +4408,7 @@
                   <a:srgbClr val="0B3D2E"/>
                 </a:solidFill>
               </a:rPr>
-              <a:t>📖 Definiciones y características</a:t>
+              <a:t>🧠 Explicación en profundidad</a:t>
             </a:r>
           </a:p>
         </p:txBody>
@@ -4100,82 +4446,97 @@
                   <a:srgbClr val="22282E"/>
                 </a:solidFill>
               </a:rPr>
-              <a:t>•  SSTI: el input se interpreta dentro de una plantilla del servidor. Característica: puede ejecutar código del lado servidor.</a:t>
-            </a:r>
-          </a:p>
-          <a:p>
-            <a:pPr>
-              <a:spcAft>
-                <a:spcPts val="600"/>
-              </a:spcAft>
-            </a:pPr>
-            <a:r>
-              <a:rPr sz="1500">
-                <a:solidFill>
-                  <a:srgbClr val="22282E"/>
-                </a:solidFill>
-              </a:rPr>
-              <a:t>•  Motor de plantillas: sistema que renderiza plantillas con datos (Jinja2, Twig...). Característica: cada uno tiene su sintaxis y capacidades.</a:t>
-            </a:r>
-          </a:p>
-          <a:p>
-            <a:pPr>
-              <a:spcAft>
-                <a:spcPts val="600"/>
-              </a:spcAft>
-            </a:pPr>
-            <a:r>
-              <a:rPr sz="1500">
-                <a:solidFill>
-                  <a:srgbClr val="22282E"/>
-                </a:solidFill>
-              </a:rPr>
-              <a:t>•  Payload de detección: expresión simple ({{77}}) que revela evaluación. Característica: si devuelve 49, hay SSTI.</a:t>
-            </a:r>
-          </a:p>
-          <a:p>
-            <a:pPr>
-              <a:spcAft>
-                <a:spcPts val="600"/>
-              </a:spcAft>
-            </a:pPr>
-            <a:r>
-              <a:rPr sz="1500">
-                <a:solidFill>
-                  <a:srgbClr val="22282E"/>
-                </a:solidFill>
-              </a:rPr>
-              <a:t>•  Fingerprinting: identificar el motor por respuestas a payloads. Característica: guía el exploit específico.</a:t>
-            </a:r>
-          </a:p>
-          <a:p>
-            <a:pPr>
-              <a:spcAft>
-                <a:spcPts val="600"/>
-              </a:spcAft>
-            </a:pPr>
-            <a:r>
-              <a:rPr sz="1500">
-                <a:solidFill>
-                  <a:srgbClr val="22282E"/>
-                </a:solidFill>
-              </a:rPr>
-              <a:t>•  Sandbox: entorno restringido de ejecución de plantillas. Característica: mitiga (aunque a veces se evade) la RCE.</a:t>
-            </a:r>
-          </a:p>
-          <a:p>
-            <a:pPr>
-              <a:spcAft>
-                <a:spcPts val="600"/>
-              </a:spcAft>
-            </a:pPr>
-            <a:r>
-              <a:rPr sz="1500">
-                <a:solidFill>
-                  <a:srgbClr val="22282E"/>
-                </a:solidFill>
-              </a:rPr>
-              <a:t>•  Logic-less templates: motores sin ejecución de código (Mustache). Característica: reducen el riesgo por diseño.</a:t>
+              <a:t>•  Los motores de plantillas (Jinja2, Twig, Freemarker, Handlebars) generan HTML combinando una</a:t>
+            </a:r>
+          </a:p>
+          <a:p>
+            <a:pPr>
+              <a:spcAft>
+                <a:spcPts val="600"/>
+              </a:spcAft>
+            </a:pPr>
+            <a:r>
+              <a:rPr sz="1500">
+                <a:solidFill>
+                  <a:srgbClr val="22282E"/>
+                </a:solidFill>
+              </a:rPr>
+              <a:t>•  plantilla fija con datos: Hola {{ nombre }} produce "Hola Ana". El Server-Side Template</a:t>
+            </a:r>
+          </a:p>
+          <a:p>
+            <a:pPr>
+              <a:spcAft>
+                <a:spcPts val="600"/>
+              </a:spcAft>
+            </a:pPr>
+            <a:r>
+              <a:rPr sz="1500">
+                <a:solidFill>
+                  <a:srgbClr val="22282E"/>
+                </a:solidFill>
+              </a:rPr>
+              <a:t>•  Injection ocurre cuando la aplicacion construye la plantilla misma con entrada del usuario, en</a:t>
+            </a:r>
+          </a:p>
+          <a:p>
+            <a:pPr>
+              <a:spcAft>
+                <a:spcPts val="600"/>
+              </a:spcAft>
+            </a:pPr>
+            <a:r>
+              <a:rPr sz="1500">
+                <a:solidFill>
+                  <a:srgbClr val="22282E"/>
+                </a:solidFill>
+              </a:rPr>
+              <a:t>•  lugar de pasar esa entrada como un dato a una plantilla fija. La diferencia es sutil pero</a:t>
+            </a:r>
+          </a:p>
+          <a:p>
+            <a:pPr>
+              <a:spcAft>
+                <a:spcPts val="600"/>
+              </a:spcAft>
+            </a:pPr>
+            <a:r>
+              <a:rPr sz="1500">
+                <a:solidFill>
+                  <a:srgbClr val="22282E"/>
+                </a:solidFill>
+              </a:rPr>
+              <a:t>•  decisiva: si el usuario controla el texto de la plantilla, controla un lenguaje de expresiones que se</a:t>
+            </a:r>
+          </a:p>
+          <a:p>
+            <a:pPr>
+              <a:spcAft>
+                <a:spcPts val="600"/>
+              </a:spcAft>
+            </a:pPr>
+            <a:r>
+              <a:rPr sz="1500">
+                <a:solidFill>
+                  <a:srgbClr val="22282E"/>
+                </a:solidFill>
+              </a:rPr>
+              <a:t>•  evalua en el servidor, y eso escala con frecuencia a ejecucion remota de codigo. La causa raiz</a:t>
+            </a:r>
+          </a:p>
+          <a:p>
+            <a:pPr>
+              <a:spcAft>
+                <a:spcPts val="600"/>
+              </a:spcAft>
+            </a:pPr>
+            <a:r>
+              <a:rPr sz="1500">
+                <a:solidFill>
+                  <a:srgbClr val="22282E"/>
+                </a:solidFill>
+              </a:rPr>
+              <a:t>•  es un patron concreto y evitable: concatenar entrada dentro de la cadena de la plantilla</a:t>
             </a:r>
           </a:p>
         </p:txBody>
@@ -4226,7 +4587,7 @@
                   <a:srgbClr val="0B3D2E"/>
                 </a:solidFill>
               </a:rPr>
-              <a:t>🧰 Herramientas y preparación</a:t>
+              <a:t>📖 Definiciones y características</a:t>
             </a:r>
           </a:p>
         </p:txBody>
@@ -4264,52 +4625,82 @@
                   <a:srgbClr val="22282E"/>
                 </a:solidFill>
               </a:rPr>
-              <a:t>•  PortSwigger labs de SSTI.</a:t>
-            </a:r>
-          </a:p>
-          <a:p>
-            <a:pPr>
-              <a:spcAft>
-                <a:spcPts val="600"/>
-              </a:spcAft>
-            </a:pPr>
-            <a:r>
-              <a:rPr sz="1500">
-                <a:solidFill>
-                  <a:srgbClr val="22282E"/>
-                </a:solidFill>
-              </a:rPr>
-              <a:t>•  tplmap (automatización, con criterio).</a:t>
-            </a:r>
-          </a:p>
-          <a:p>
-            <a:pPr>
-              <a:spcAft>
-                <a:spcPts val="600"/>
-              </a:spcAft>
-            </a:pPr>
-            <a:r>
-              <a:rPr sz="1500">
-                <a:solidFill>
-                  <a:srgbClr val="22282E"/>
-                </a:solidFill>
-              </a:rPr>
-              <a:t>•  Burp para probar payloads.</a:t>
-            </a:r>
-          </a:p>
-          <a:p>
-            <a:pPr>
-              <a:spcAft>
-                <a:spcPts val="600"/>
-              </a:spcAft>
-            </a:pPr>
-            <a:r>
-              <a:rPr sz="1500">
-                <a:solidFill>
-                  <a:srgbClr val="22282E"/>
-                </a:solidFill>
-              </a:rPr>
-              <a:t>•  git clone https://github.com/epinna/tplmap &amp;&amp; cd tplmap &amp;&amp; pip install -r requirements.txt</a:t>
+              <a:t>•  SSTI: el input se interpreta dentro de una plantilla del servidor. Característica: puede ejecutar código del lado servidor.</a:t>
+            </a:r>
+          </a:p>
+          <a:p>
+            <a:pPr>
+              <a:spcAft>
+                <a:spcPts val="600"/>
+              </a:spcAft>
+            </a:pPr>
+            <a:r>
+              <a:rPr sz="1500">
+                <a:solidFill>
+                  <a:srgbClr val="22282E"/>
+                </a:solidFill>
+              </a:rPr>
+              <a:t>•  Motor de plantillas: sistema que renderiza plantillas con datos (Jinja2, Twig...). Característica: cada uno tiene su sintaxis y capacidades.</a:t>
+            </a:r>
+          </a:p>
+          <a:p>
+            <a:pPr>
+              <a:spcAft>
+                <a:spcPts val="600"/>
+              </a:spcAft>
+            </a:pPr>
+            <a:r>
+              <a:rPr sz="1500">
+                <a:solidFill>
+                  <a:srgbClr val="22282E"/>
+                </a:solidFill>
+              </a:rPr>
+              <a:t>•  Payload de detección: expresión simple ({{77}}) que revela evaluación. Característica: si devuelve 49, hay SSTI.</a:t>
+            </a:r>
+          </a:p>
+          <a:p>
+            <a:pPr>
+              <a:spcAft>
+                <a:spcPts val="600"/>
+              </a:spcAft>
+            </a:pPr>
+            <a:r>
+              <a:rPr sz="1500">
+                <a:solidFill>
+                  <a:srgbClr val="22282E"/>
+                </a:solidFill>
+              </a:rPr>
+              <a:t>•  Fingerprinting: identificar el motor por respuestas a payloads. Característica: guía el exploit específico.</a:t>
+            </a:r>
+          </a:p>
+          <a:p>
+            <a:pPr>
+              <a:spcAft>
+                <a:spcPts val="600"/>
+              </a:spcAft>
+            </a:pPr>
+            <a:r>
+              <a:rPr sz="1500">
+                <a:solidFill>
+                  <a:srgbClr val="22282E"/>
+                </a:solidFill>
+              </a:rPr>
+              <a:t>•  Sandbox: entorno restringido de ejecución de plantillas. Característica: mitiga (aunque a veces se evade) la RCE.</a:t>
+            </a:r>
+          </a:p>
+          <a:p>
+            <a:pPr>
+              <a:spcAft>
+                <a:spcPts val="600"/>
+              </a:spcAft>
+            </a:pPr>
+            <a:r>
+              <a:rPr sz="1500">
+                <a:solidFill>
+                  <a:srgbClr val="22282E"/>
+                </a:solidFill>
+              </a:rPr>
+              <a:t>•  Logic-less templates: motores sin ejecución de código (Mustache). Característica: reducen el riesgo por diseño.</a:t>
             </a:r>
           </a:p>
         </p:txBody>
@@ -4360,7 +4751,7 @@
                   <a:srgbClr val="0B3D2E"/>
                 </a:solidFill>
               </a:rPr>
-              <a:t>🧪 Laboratorio guiado</a:t>
+              <a:t>📔 Glosario</a:t>
             </a:r>
           </a:p>
         </p:txBody>
@@ -4398,97 +4789,97 @@
                   <a:srgbClr val="22282E"/>
                 </a:solidFill>
               </a:rPr>
-              <a:t>•  Introduce {{77}} y ${77} en campos que se reflejan (nombre, plantilla de email).</a:t>
-            </a:r>
-          </a:p>
-          <a:p>
-            <a:pPr>
-              <a:spcAft>
-                <a:spcPts val="600"/>
-              </a:spcAft>
-            </a:pPr>
-            <a:r>
-              <a:rPr sz="1500">
-                <a:solidFill>
-                  <a:srgbClr val="22282E"/>
-                </a:solidFill>
-              </a:rPr>
-              <a:t>•  Si obtienes 49, confirma SSTI e identifica el motor con payloads diferenciadores.</a:t>
-            </a:r>
-          </a:p>
-          <a:p>
-            <a:pPr>
-              <a:spcAft>
-                <a:spcPts val="600"/>
-              </a:spcAft>
-            </a:pPr>
-            <a:r>
-              <a:rPr sz="1500">
-                <a:solidFill>
-                  <a:srgbClr val="22282E"/>
-                </a:solidFill>
-              </a:rPr>
-              <a:t>•  En Jinja2 (Python), escala a lectura de configuración y luego a ejecución:</a:t>
-            </a:r>
-          </a:p>
-          <a:p>
-            <a:pPr>
-              <a:spcAft>
-                <a:spcPts val="600"/>
-              </a:spcAft>
-            </a:pPr>
-            <a:r>
-              <a:rPr sz="1500">
-                <a:solidFill>
-                  <a:srgbClr val="22282E"/>
-                </a:solidFill>
-              </a:rPr>
-              <a:t>•  {{ config.items() }}</a:t>
-            </a:r>
-          </a:p>
-          <a:p>
-            <a:pPr>
-              <a:spcAft>
-                <a:spcPts val="600"/>
-              </a:spcAft>
-            </a:pPr>
-            <a:r>
-              <a:rPr sz="1500">
-                <a:solidFill>
-                  <a:srgbClr val="22282E"/>
-                </a:solidFill>
-              </a:rPr>
-              <a:t>•  {{ ''.class.mro[1].subclasses() }}</a:t>
-            </a:r>
-          </a:p>
-          <a:p>
-            <a:pPr>
-              <a:spcAft>
-                <a:spcPts val="600"/>
-              </a:spcAft>
-            </a:pPr>
-            <a:r>
-              <a:rPr sz="1500">
-                <a:solidFill>
-                  <a:srgbClr val="22282E"/>
-                </a:solidFill>
-              </a:rPr>
-              <a:t>•  Encuentra un subclass que permita ejecutar comandos y ejecútalo en el lab.</a:t>
-            </a:r>
-          </a:p>
-          <a:p>
-            <a:pPr>
-              <a:spcAft>
-                <a:spcPts val="600"/>
-              </a:spcAft>
-            </a:pPr>
-            <a:r>
-              <a:rPr sz="1500">
-                <a:solidFill>
-                  <a:srgbClr val="22282E"/>
-                </a:solidFill>
-              </a:rPr>
-              <a:t>•  En Twig/Freemarker, usa los payloads específicos del motor para leer archivos o ejecutar.</a:t>
+              <a:t>•  Termino — Definicion concisa</a:t>
+            </a:r>
+          </a:p>
+          <a:p>
+            <a:pPr>
+              <a:spcAft>
+                <a:spcPts val="600"/>
+              </a:spcAft>
+            </a:pPr>
+            <a:r>
+              <a:rPr sz="1500">
+                <a:solidFill>
+                  <a:srgbClr val="22282E"/>
+                </a:solidFill>
+              </a:rPr>
+              <a:t>•  Motor de plantillas — Genera HTML combinando plantilla y datos</a:t>
+            </a:r>
+          </a:p>
+          <a:p>
+            <a:pPr>
+              <a:spcAft>
+                <a:spcPts val="600"/>
+              </a:spcAft>
+            </a:pPr>
+            <a:r>
+              <a:rPr sz="1500">
+                <a:solidFill>
+                  <a:srgbClr val="22282E"/>
+                </a:solidFill>
+              </a:rPr>
+              <a:t>•  SSTI — Inyeccion en la plantilla, evaluada en el servidor</a:t>
+            </a:r>
+          </a:p>
+          <a:p>
+            <a:pPr>
+              <a:spcAft>
+                <a:spcPts val="600"/>
+              </a:spcAft>
+            </a:pPr>
+            <a:r>
+              <a:rPr sz="1500">
+                <a:solidFill>
+                  <a:srgbClr val="22282E"/>
+                </a:solidFill>
+              </a:rPr>
+              <a:t>•  Plantilla como dato vs. como codigo — El fallo es construir la plantilla con entrada</a:t>
+            </a:r>
+          </a:p>
+          <a:p>
+            <a:pPr>
+              <a:spcAft>
+                <a:spcPts val="600"/>
+              </a:spcAft>
+            </a:pPr>
+            <a:r>
+              <a:rPr sz="1500">
+                <a:solidFill>
+                  <a:srgbClr val="22282E"/>
+                </a:solidFill>
+              </a:rPr>
+              <a:t>•  Sonda 77 — Deteccion; si la expresion se evalua, hay SSTI</a:t>
+            </a:r>
+          </a:p>
+          <a:p>
+            <a:pPr>
+              <a:spcAft>
+                <a:spcPts val="600"/>
+              </a:spcAft>
+            </a:pPr>
+            <a:r>
+              <a:rPr sz="1500">
+                <a:solidFill>
+                  <a:srgbClr val="22282E"/>
+                </a:solidFill>
+              </a:rPr>
+              <a:t>•  Fingerprinting del motor — Identificar el motor por que sintaxis evalua</a:t>
+            </a:r>
+          </a:p>
+          <a:p>
+            <a:pPr>
+              <a:spcAft>
+                <a:spcPts val="600"/>
+              </a:spcAft>
+            </a:pPr>
+            <a:r>
+              <a:rPr sz="1500">
+                <a:solidFill>
+                  <a:srgbClr val="22282E"/>
+                </a:solidFill>
+              </a:rPr>
+              <a:t>•  Jinja2 / Twig — Motores con sintaxis de dobles llaves</a:t>
             </a:r>
           </a:p>
         </p:txBody>
@@ -4539,7 +4930,7 @@
                   <a:srgbClr val="0B3D2E"/>
                 </a:solidFill>
               </a:rPr>
-              <a:t>✍️ Ejercicios</a:t>
+              <a:t>🧰 Herramientas y preparación</a:t>
             </a:r>
           </a:p>
         </p:txBody>
@@ -4577,82 +4968,37 @@
                   <a:srgbClr val="22282E"/>
                 </a:solidFill>
               </a:rPr>
-              <a:t>•  Diferencia la respuesta de {{77}} en SSTI de un simple reflejo de texto.</a:t>
-            </a:r>
-          </a:p>
-          <a:p>
-            <a:pPr>
-              <a:spcAft>
-                <a:spcPts val="600"/>
-              </a:spcAft>
-            </a:pPr>
-            <a:r>
-              <a:rPr sz="1500">
-                <a:solidFill>
-                  <a:srgbClr val="22282E"/>
-                </a:solidFill>
-              </a:rPr>
-              <a:t>•  Haz fingerprinting distinguiendo Jinja2 de Twig con payloads.</a:t>
-            </a:r>
-          </a:p>
-          <a:p>
-            <a:pPr>
-              <a:spcAft>
-                <a:spcPts val="600"/>
-              </a:spcAft>
-            </a:pPr>
-            <a:r>
-              <a:rPr sz="1500">
-                <a:solidFill>
-                  <a:srgbClr val="22282E"/>
-                </a:solidFill>
-              </a:rPr>
-              <a:t>•  Explica la cadena class → mro → subclasses en Python.</a:t>
-            </a:r>
-          </a:p>
-          <a:p>
-            <a:pPr>
-              <a:spcAft>
-                <a:spcPts val="600"/>
-              </a:spcAft>
-            </a:pPr>
-            <a:r>
-              <a:rPr sz="1500">
-                <a:solidFill>
-                  <a:srgbClr val="22282E"/>
-                </a:solidFill>
-              </a:rPr>
-              <a:t>•  Diferencia SSTI de XSS: mismo {{77}}, distinto sink.</a:t>
-            </a:r>
-          </a:p>
-          <a:p>
-            <a:pPr>
-              <a:spcAft>
-                <a:spcPts val="600"/>
-              </a:spcAft>
-            </a:pPr>
-            <a:r>
-              <a:rPr sz="1500">
-                <a:solidFill>
-                  <a:srgbClr val="22282E"/>
-                </a:solidFill>
-              </a:rPr>
-              <a:t>•  Usa tplmap y luego reproduce manualmente su payload.</a:t>
-            </a:r>
-          </a:p>
-          <a:p>
-            <a:pPr>
-              <a:spcAft>
-                <a:spcPts val="600"/>
-              </a:spcAft>
-            </a:pPr>
-            <a:r>
-              <a:rPr sz="1500">
-                <a:solidFill>
-                  <a:srgbClr val="22282E"/>
-                </a:solidFill>
-              </a:rPr>
-              <a:t>•  Propón una arquitectura con plantillas logic-less para el caso de uso.</a:t>
+              <a:t>•  PortSwigger labs de SSTI.</a:t>
+            </a:r>
+          </a:p>
+          <a:p>
+            <a:pPr>
+              <a:spcAft>
+                <a:spcPts val="600"/>
+              </a:spcAft>
+            </a:pPr>
+            <a:r>
+              <a:rPr sz="1500">
+                <a:solidFill>
+                  <a:srgbClr val="22282E"/>
+                </a:solidFill>
+              </a:rPr>
+              <a:t>•  tplmap (automatización, con criterio).</a:t>
+            </a:r>
+          </a:p>
+          <a:p>
+            <a:pPr>
+              <a:spcAft>
+                <a:spcPts val="600"/>
+              </a:spcAft>
+            </a:pPr>
+            <a:r>
+              <a:rPr sz="1500">
+                <a:solidFill>
+                  <a:srgbClr val="22282E"/>
+                </a:solidFill>
+              </a:rPr>
+              <a:t>•  Burp para probar payloads.</a:t>
             </a:r>
           </a:p>
         </p:txBody>
@@ -4703,7 +5049,7 @@
                   <a:srgbClr val="0B3D2E"/>
                 </a:solidFill>
               </a:rPr>
-              <a:t>📝 Reto verificable</a:t>
+              <a:t>🧪 Laboratorio guiado</a:t>
             </a:r>
           </a:p>
         </p:txBody>
@@ -4741,22 +5087,97 @@
                   <a:srgbClr val="22282E"/>
                 </a:solidFill>
               </a:rPr>
-              <a:t>•  Resuelve un lab de SSTI de PortSwigger que exija fingerprint + RCE y ejecuta un comando (p. ej. leer un archivo del sistema).</a:t>
-            </a:r>
-          </a:p>
-          <a:p>
-            <a:pPr>
-              <a:spcAft>
-                <a:spcPts val="600"/>
-              </a:spcAft>
-            </a:pPr>
-            <a:r>
-              <a:rPr sz="1500">
-                <a:solidFill>
-                  <a:srgbClr val="22282E"/>
-                </a:solidFill>
-              </a:rPr>
-              <a:t>•  Criterio de aceptación: el lab queda resuelto, documentas el motor identificado, la cadena de payloads y la defensa (sandbox, separar datos de plantilla, motor logic-less).</a:t>
+              <a:t>•  Introduce {{77}} y ${77} en campos que se reflejan (nombre, plantilla de email).</a:t>
+            </a:r>
+          </a:p>
+          <a:p>
+            <a:pPr>
+              <a:spcAft>
+                <a:spcPts val="600"/>
+              </a:spcAft>
+            </a:pPr>
+            <a:r>
+              <a:rPr sz="1500">
+                <a:solidFill>
+                  <a:srgbClr val="22282E"/>
+                </a:solidFill>
+              </a:rPr>
+              <a:t>•  Si obtienes 49, confirma SSTI e identifica el motor con payloads diferenciadores.</a:t>
+            </a:r>
+          </a:p>
+          <a:p>
+            <a:pPr>
+              <a:spcAft>
+                <a:spcPts val="600"/>
+              </a:spcAft>
+            </a:pPr>
+            <a:r>
+              <a:rPr sz="1500">
+                <a:solidFill>
+                  <a:srgbClr val="22282E"/>
+                </a:solidFill>
+              </a:rPr>
+              <a:t>•  En Jinja2 (Python), escala a lectura de configuración y luego a ejecución:</a:t>
+            </a:r>
+          </a:p>
+          <a:p>
+            <a:pPr>
+              <a:spcAft>
+                <a:spcPts val="600"/>
+              </a:spcAft>
+            </a:pPr>
+            <a:r>
+              <a:rPr sz="1500">
+                <a:solidFill>
+                  <a:srgbClr val="22282E"/>
+                </a:solidFill>
+              </a:rPr>
+              <a:t>•  Encuentra un subclass que permita ejecutar comandos y ejecútalo en el lab.</a:t>
+            </a:r>
+          </a:p>
+          <a:p>
+            <a:pPr>
+              <a:spcAft>
+                <a:spcPts val="600"/>
+              </a:spcAft>
+            </a:pPr>
+            <a:r>
+              <a:rPr sz="1500">
+                <a:solidFill>
+                  <a:srgbClr val="22282E"/>
+                </a:solidFill>
+              </a:rPr>
+              <a:t>•  En Twig/Freemarker, usa los payloads específicos del motor para leer archivos o ejecutar.</a:t>
+            </a:r>
+          </a:p>
+          <a:p>
+            <a:pPr>
+              <a:spcAft>
+                <a:spcPts val="600"/>
+              </a:spcAft>
+            </a:pPr>
+            <a:r>
+              <a:rPr sz="1500">
+                <a:solidFill>
+                  <a:srgbClr val="22282E"/>
+                </a:solidFill>
+              </a:rPr>
+              <a:t>•  Confirma la RCE con una interacción OOB.</a:t>
+            </a:r>
+          </a:p>
+          <a:p>
+            <a:pPr>
+              <a:spcAft>
+                <a:spcPts val="600"/>
+              </a:spcAft>
+            </a:pPr>
+            <a:r>
+              <a:rPr sz="1500">
+                <a:solidFill>
+                  <a:srgbClr val="22282E"/>
+                </a:solidFill>
+              </a:rPr>
+              <a:t>•  Documenta el motor, la cadena de escalada y el impacto.</a:t>
             </a:r>
           </a:p>
         </p:txBody>
